--- a/이미지.pptx
+++ b/이미지.pptx
@@ -6,6 +6,8 @@
   </p:sldMasterIdLst>
   <p:sldIdLst>
     <p:sldId id="256" r:id="rId2"/>
+    <p:sldId id="257" r:id="rId3"/>
+    <p:sldId id="258" r:id="rId4"/>
   </p:sldIdLst>
   <p:sldSz cx="12192000" cy="6858000"/>
   <p:notesSz cx="6858000" cy="9144000"/>
@@ -104,6 +106,11 @@
       </a:defRPr>
     </a:lvl9pPr>
   </p:defaultTextStyle>
+  <p:extLst>
+    <p:ext uri="{EFAFB233-063F-42B5-8137-9DF3F51BA10A}">
+      <p15:sldGuideLst xmlns:p15="http://schemas.microsoft.com/office/powerpoint/2012/main"/>
+    </p:ext>
+  </p:extLst>
 </p:presentation>
 </file>
 
@@ -254,7 +261,7 @@
           <a:p>
             <a:fld id="{4E0BBF2E-AD17-4D8A-93B6-0D0449C463A1}" type="datetimeFigureOut">
               <a:rPr lang="ko-KR" altLang="en-US" smtClean="0"/>
-              <a:t>2025-09-28</a:t>
+              <a:t>2025-09-29</a:t>
             </a:fld>
             <a:endParaRPr lang="ko-KR" altLang="en-US"/>
           </a:p>
@@ -452,7 +459,7 @@
           <a:p>
             <a:fld id="{4E0BBF2E-AD17-4D8A-93B6-0D0449C463A1}" type="datetimeFigureOut">
               <a:rPr lang="ko-KR" altLang="en-US" smtClean="0"/>
-              <a:t>2025-09-28</a:t>
+              <a:t>2025-09-29</a:t>
             </a:fld>
             <a:endParaRPr lang="ko-KR" altLang="en-US"/>
           </a:p>
@@ -660,7 +667,7 @@
           <a:p>
             <a:fld id="{4E0BBF2E-AD17-4D8A-93B6-0D0449C463A1}" type="datetimeFigureOut">
               <a:rPr lang="ko-KR" altLang="en-US" smtClean="0"/>
-              <a:t>2025-09-28</a:t>
+              <a:t>2025-09-29</a:t>
             </a:fld>
             <a:endParaRPr lang="ko-KR" altLang="en-US"/>
           </a:p>
@@ -858,7 +865,7 @@
           <a:p>
             <a:fld id="{4E0BBF2E-AD17-4D8A-93B6-0D0449C463A1}" type="datetimeFigureOut">
               <a:rPr lang="ko-KR" altLang="en-US" smtClean="0"/>
-              <a:t>2025-09-28</a:t>
+              <a:t>2025-09-29</a:t>
             </a:fld>
             <a:endParaRPr lang="ko-KR" altLang="en-US"/>
           </a:p>
@@ -1133,7 +1140,7 @@
           <a:p>
             <a:fld id="{4E0BBF2E-AD17-4D8A-93B6-0D0449C463A1}" type="datetimeFigureOut">
               <a:rPr lang="ko-KR" altLang="en-US" smtClean="0"/>
-              <a:t>2025-09-28</a:t>
+              <a:t>2025-09-29</a:t>
             </a:fld>
             <a:endParaRPr lang="ko-KR" altLang="en-US"/>
           </a:p>
@@ -1398,7 +1405,7 @@
           <a:p>
             <a:fld id="{4E0BBF2E-AD17-4D8A-93B6-0D0449C463A1}" type="datetimeFigureOut">
               <a:rPr lang="ko-KR" altLang="en-US" smtClean="0"/>
-              <a:t>2025-09-28</a:t>
+              <a:t>2025-09-29</a:t>
             </a:fld>
             <a:endParaRPr lang="ko-KR" altLang="en-US"/>
           </a:p>
@@ -1810,7 +1817,7 @@
           <a:p>
             <a:fld id="{4E0BBF2E-AD17-4D8A-93B6-0D0449C463A1}" type="datetimeFigureOut">
               <a:rPr lang="ko-KR" altLang="en-US" smtClean="0"/>
-              <a:t>2025-09-28</a:t>
+              <a:t>2025-09-29</a:t>
             </a:fld>
             <a:endParaRPr lang="ko-KR" altLang="en-US"/>
           </a:p>
@@ -1951,7 +1958,7 @@
           <a:p>
             <a:fld id="{4E0BBF2E-AD17-4D8A-93B6-0D0449C463A1}" type="datetimeFigureOut">
               <a:rPr lang="ko-KR" altLang="en-US" smtClean="0"/>
-              <a:t>2025-09-28</a:t>
+              <a:t>2025-09-29</a:t>
             </a:fld>
             <a:endParaRPr lang="ko-KR" altLang="en-US"/>
           </a:p>
@@ -2064,7 +2071,7 @@
           <a:p>
             <a:fld id="{4E0BBF2E-AD17-4D8A-93B6-0D0449C463A1}" type="datetimeFigureOut">
               <a:rPr lang="ko-KR" altLang="en-US" smtClean="0"/>
-              <a:t>2025-09-28</a:t>
+              <a:t>2025-09-29</a:t>
             </a:fld>
             <a:endParaRPr lang="ko-KR" altLang="en-US"/>
           </a:p>
@@ -2375,7 +2382,7 @@
           <a:p>
             <a:fld id="{4E0BBF2E-AD17-4D8A-93B6-0D0449C463A1}" type="datetimeFigureOut">
               <a:rPr lang="ko-KR" altLang="en-US" smtClean="0"/>
-              <a:t>2025-09-28</a:t>
+              <a:t>2025-09-29</a:t>
             </a:fld>
             <a:endParaRPr lang="ko-KR" altLang="en-US"/>
           </a:p>
@@ -2663,7 +2670,7 @@
           <a:p>
             <a:fld id="{4E0BBF2E-AD17-4D8A-93B6-0D0449C463A1}" type="datetimeFigureOut">
               <a:rPr lang="ko-KR" altLang="en-US" smtClean="0"/>
-              <a:t>2025-09-28</a:t>
+              <a:t>2025-09-29</a:t>
             </a:fld>
             <a:endParaRPr lang="ko-KR" altLang="en-US"/>
           </a:p>
@@ -2904,7 +2911,7 @@
           <a:p>
             <a:fld id="{4E0BBF2E-AD17-4D8A-93B6-0D0449C463A1}" type="datetimeFigureOut">
               <a:rPr lang="ko-KR" altLang="en-US" smtClean="0"/>
-              <a:t>2025-09-28</a:t>
+              <a:t>2025-09-29</a:t>
             </a:fld>
             <a:endParaRPr lang="ko-KR" altLang="en-US"/>
           </a:p>
@@ -3382,6 +3389,263 @@
 </p:sld>
 </file>
 
+<file path=ppt/slides/slide2.xml><?xml version="1.0" encoding="utf-8"?>
+<p:sld xmlns:a="http://schemas.openxmlformats.org/drawingml/2006/main" xmlns:r="http://schemas.openxmlformats.org/officeDocument/2006/relationships" xmlns:p="http://schemas.openxmlformats.org/presentationml/2006/main">
+  <p:cSld>
+    <p:spTree>
+      <p:nvGrpSpPr>
+        <p:cNvPr id="1" name=""/>
+        <p:cNvGrpSpPr/>
+        <p:nvPr/>
+      </p:nvGrpSpPr>
+      <p:grpSpPr>
+        <a:xfrm>
+          <a:off x="0" y="0"/>
+          <a:ext cx="0" cy="0"/>
+          <a:chOff x="0" y="0"/>
+          <a:chExt cx="0" cy="0"/>
+        </a:xfrm>
+      </p:grpSpPr>
+      <p:pic>
+        <p:nvPicPr>
+          <p:cNvPr id="5" name="내용 개체 틀 4">
+            <a:extLst>
+              <a:ext uri="{FF2B5EF4-FFF2-40B4-BE49-F238E27FC236}">
+                <a16:creationId xmlns:a16="http://schemas.microsoft.com/office/drawing/2014/main" id="{C3267438-5A47-43FF-ADED-6CC4CFFC3A99}"/>
+              </a:ext>
+            </a:extLst>
+          </p:cNvPr>
+          <p:cNvPicPr>
+            <a:picLocks noGrp="1" noChangeAspect="1"/>
+          </p:cNvPicPr>
+          <p:nvPr>
+            <p:ph idx="1"/>
+          </p:nvPr>
+        </p:nvPicPr>
+        <p:blipFill>
+          <a:blip r:embed="rId2">
+            <a:extLst>
+              <a:ext uri="{BEBA8EAE-BF5A-486C-A8C5-ECC9F3942E4B}">
+                <a14:imgProps xmlns:a14="http://schemas.microsoft.com/office/drawing/2010/main">
+                  <a14:imgLayer r:embed="rId3">
+                    <a14:imgEffect>
+                      <a14:backgroundRemoval t="10000" b="90000" l="10000" r="90000">
+                        <a14:foregroundMark x1="43417" y1="37517" x2="43417" y2="43958"/>
+                        <a14:foregroundMark x1="52570" y1="31673" x2="53989" y2="34661"/>
+                        <a14:foregroundMark x1="48116" y1="27490" x2="50171" y2="27490"/>
+                        <a14:foregroundMark x1="53059" y1="28021" x2="53868" y2="28793"/>
+                        <a14:foregroundMark x1="50171" y1="27357" x2="52766" y2="28685"/>
+                        <a14:foregroundMark x1="55360" y1="29416" x2="57954" y2="33732"/>
+                        <a14:foregroundMark x1="58639" y1="33997" x2="61038" y2="41036"/>
+                        <a14:foregroundMark x1="58150" y1="32072" x2="60744" y2="37517"/>
+                        <a14:foregroundMark x1="61038" y1="38977" x2="62457" y2="48340"/>
+                        <a14:foregroundMark x1="62457" y1="39110" x2="62555" y2="56441"/>
+                        <a14:foregroundMark x1="62751" y1="48473" x2="60059" y2="65471"/>
+                        <a14:foregroundMark x1="62653" y1="57503" x2="58639" y2="68194"/>
+                        <a14:foregroundMark x1="59765" y1="66667" x2="52129" y2="74568"/>
+                        <a14:foregroundMark x1="52129" y1="74568" x2="51003" y2="74635"/>
+                        <a14:foregroundMark x1="42997" y1="71831" x2="52961" y2="72510"/>
+                        <a14:foregroundMark x1="37249" y1="58035" x2="41899" y2="67331"/>
+                        <a14:foregroundMark x1="41899" y1="67331" x2="45326" y2="68858"/>
+                        <a14:foregroundMark x1="43785" y1="72341" x2="49192" y2="73572"/>
+                        <a14:foregroundMark x1="42193" y1="71979" x2="42787" y2="72114"/>
+                        <a14:foregroundMark x1="38424" y1="56042" x2="40822" y2="67928"/>
+                        <a14:foregroundMark x1="36613" y1="50598" x2="40647" y2="70407"/>
+                        <a14:foregroundMark x1="37053" y1="42762" x2="38815" y2="61421"/>
+                        <a14:foregroundMark x1="36711" y1="47211" x2="39109" y2="65339"/>
+                        <a14:foregroundMark x1="36294" y1="46496" x2="36417" y2="54980"/>
+                        <a14:foregroundMark x1="36417" y1="54980" x2="37934" y2="61952"/>
+                        <a14:foregroundMark x1="39207" y1="34529" x2="47332" y2="28685"/>
+                        <a14:foregroundMark x1="47332" y1="28685" x2="47577" y2="28287"/>
+                        <a14:foregroundMark x1="41214" y1="31806" x2="46696" y2="27357"/>
+                        <a14:foregroundMark x1="51670" y1="26941" x2="54439" y2="27793"/>
+                        <a14:foregroundMark x1="61233" y1="37782" x2="58835" y2="31939"/>
+                        <a14:backgroundMark x1="41899" y1="73307" x2="46011" y2="76959"/>
+                        <a14:backgroundMark x1="47675" y1="75896" x2="50367" y2="76029"/>
+                        <a14:backgroundMark x1="40431" y1="70717" x2="41899" y2="71846"/>
+                        <a14:backgroundMark x1="35242" y1="40903" x2="35047" y2="46414"/>
+                        <a14:backgroundMark x1="49094" y1="25232" x2="52374" y2="25498"/>
+                        <a14:backgroundMark x1="55066" y1="26693" x2="56437" y2="27224"/>
+                        <a14:backgroundMark x1="35438" y1="41434" x2="35928" y2="39774"/>
+                      </a14:backgroundRemoval>
+                    </a14:imgEffect>
+                  </a14:imgLayer>
+                </a14:imgProps>
+              </a:ext>
+              <a:ext uri="{28A0092B-C50C-407E-A947-70E740481C1C}">
+                <a14:useLocalDpi xmlns:a14="http://schemas.microsoft.com/office/drawing/2010/main" val="0"/>
+              </a:ext>
+            </a:extLst>
+          </a:blip>
+          <a:stretch>
+            <a:fillRect/>
+          </a:stretch>
+        </p:blipFill>
+        <p:spPr>
+          <a:xfrm>
+            <a:off x="2934404" y="1047534"/>
+            <a:ext cx="5902910" cy="4351338"/>
+          </a:xfrm>
+        </p:spPr>
+      </p:pic>
+    </p:spTree>
+    <p:extLst>
+      <p:ext uri="{BB962C8B-B14F-4D97-AF65-F5344CB8AC3E}">
+        <p14:creationId xmlns:p14="http://schemas.microsoft.com/office/powerpoint/2010/main" val="3130788566"/>
+      </p:ext>
+    </p:extLst>
+  </p:cSld>
+  <p:clrMapOvr>
+    <a:masterClrMapping/>
+  </p:clrMapOvr>
+</p:sld>
+</file>
+
+<file path=ppt/slides/slide3.xml><?xml version="1.0" encoding="utf-8"?>
+<p:sld xmlns:a="http://schemas.openxmlformats.org/drawingml/2006/main" xmlns:r="http://schemas.openxmlformats.org/officeDocument/2006/relationships" xmlns:p="http://schemas.openxmlformats.org/presentationml/2006/main">
+  <p:cSld>
+    <p:spTree>
+      <p:nvGrpSpPr>
+        <p:cNvPr id="1" name=""/>
+        <p:cNvGrpSpPr/>
+        <p:nvPr/>
+      </p:nvGrpSpPr>
+      <p:grpSpPr>
+        <a:xfrm>
+          <a:off x="0" y="0"/>
+          <a:ext cx="0" cy="0"/>
+          <a:chOff x="0" y="0"/>
+          <a:chExt cx="0" cy="0"/>
+        </a:xfrm>
+      </p:grpSpPr>
+      <p:sp>
+        <p:nvSpPr>
+          <p:cNvPr id="2" name="제목 1">
+            <a:extLst>
+              <a:ext uri="{FF2B5EF4-FFF2-40B4-BE49-F238E27FC236}">
+                <a16:creationId xmlns:a16="http://schemas.microsoft.com/office/drawing/2014/main" id="{E659306A-B424-40F0-B803-743D1904597D}"/>
+              </a:ext>
+            </a:extLst>
+          </p:cNvPr>
+          <p:cNvSpPr>
+            <a:spLocks noGrp="1"/>
+          </p:cNvSpPr>
+          <p:nvPr>
+            <p:ph type="title"/>
+          </p:nvPr>
+        </p:nvSpPr>
+        <p:spPr/>
+        <p:txBody>
+          <a:bodyPr/>
+          <a:lstStyle/>
+          <a:p>
+            <a:endParaRPr lang="ko-KR" altLang="en-US"/>
+          </a:p>
+        </p:txBody>
+      </p:sp>
+      <p:pic>
+        <p:nvPicPr>
+          <p:cNvPr id="4" name="내용 개체 틀 3">
+            <a:extLst>
+              <a:ext uri="{FF2B5EF4-FFF2-40B4-BE49-F238E27FC236}">
+                <a16:creationId xmlns:a16="http://schemas.microsoft.com/office/drawing/2014/main" id="{7C4460A6-7D06-48F3-89DE-23F4BFA3ED5D}"/>
+              </a:ext>
+            </a:extLst>
+          </p:cNvPr>
+          <p:cNvPicPr>
+            <a:picLocks noGrp="1" noChangeAspect="1"/>
+          </p:cNvPicPr>
+          <p:nvPr>
+            <p:ph idx="1"/>
+          </p:nvPr>
+        </p:nvPicPr>
+        <p:blipFill>
+          <a:blip r:embed="rId2">
+            <a:extLst>
+              <a:ext uri="{BEBA8EAE-BF5A-486C-A8C5-ECC9F3942E4B}">
+                <a14:imgProps xmlns:a14="http://schemas.microsoft.com/office/drawing/2010/main">
+                  <a14:imgLayer r:embed="rId3">
+                    <a14:imgEffect>
+                      <a14:backgroundRemoval t="10000" b="90000" l="10000" r="90000">
+                        <a14:foregroundMark x1="44347" y1="33865" x2="48164" y2="51129"/>
+                        <a14:foregroundMark x1="51395" y1="33533" x2="53255" y2="37517"/>
+                        <a14:foregroundMark x1="53255" y1="37517" x2="53304" y2="39907"/>
+                        <a14:foregroundMark x1="40920" y1="39509" x2="42829" y2="47543"/>
+                        <a14:foregroundMark x1="42829" y1="47543" x2="43025" y2="47676"/>
+                        <a14:foregroundMark x1="43319" y1="41368" x2="46060" y2="48938"/>
+                        <a14:foregroundMark x1="38815" y1="35790" x2="40627" y2="32470"/>
+                        <a14:foregroundMark x1="41801" y1="31341" x2="45326" y2="28752"/>
+                        <a14:foregroundMark x1="45179" y1="28021" x2="50367" y2="27092"/>
+                        <a14:foregroundMark x1="50808" y1="27291" x2="54528" y2="29216"/>
+                        <a14:foregroundMark x1="55066" y1="28951" x2="57269" y2="31673"/>
+                        <a14:foregroundMark x1="57709" y1="31873" x2="59471" y2="37649"/>
+                        <a14:foregroundMark x1="59471" y1="37649" x2="59863" y2="38313"/>
+                        <a14:foregroundMark x1="58395" y1="33400" x2="60548" y2="38446"/>
+                        <a14:foregroundMark x1="58150" y1="32271" x2="60989" y2="38380"/>
+                        <a14:foregroundMark x1="61185" y1="38845" x2="62800" y2="48805"/>
+                        <a14:foregroundMark x1="62800" y1="48805" x2="62849" y2="50000"/>
+                        <a14:foregroundMark x1="62261" y1="48738" x2="62555" y2="54449"/>
+                        <a14:foregroundMark x1="62555" y1="54449" x2="61723" y2="58566"/>
+                        <a14:foregroundMark x1="61968" y1="58367" x2="58003" y2="67928"/>
+                        <a14:foregroundMark x1="58003" y1="67928" x2="58003" y2="67928"/>
+                        <a14:foregroundMark x1="62261" y1="58367" x2="59373" y2="65471"/>
+                        <a14:foregroundMark x1="59373" y1="65471" x2="59178" y2="65803"/>
+                        <a14:foregroundMark x1="59325" y1="66069" x2="58248" y2="68659"/>
+                        <a14:foregroundMark x1="58248" y1="68659" x2="51787" y2="73838"/>
+                        <a14:foregroundMark x1="39941" y1="66401" x2="41312" y2="68526"/>
+                        <a14:foregroundMark x1="41312" y1="68526" x2="46941" y2="72709"/>
+                        <a14:foregroundMark x1="46941" y1="72709" x2="48899" y2="72776"/>
+                        <a14:foregroundMark x1="48260" y1="74084" x2="46696" y2="74037"/>
+                        <a14:foregroundMark x1="45260" y1="72888" x2="42046" y2="70319"/>
+                        <a14:foregroundMark x1="36515" y1="54914" x2="36760" y2="57636"/>
+                        <a14:foregroundMark x1="36760" y1="57636" x2="38913" y2="65538"/>
+                        <a14:foregroundMark x1="37197" y1="42653" x2="36123" y2="49801"/>
+                        <a14:foregroundMark x1="37739" y1="39044" x2="37662" y2="39560"/>
+                        <a14:foregroundMark x1="36123" y1="49801" x2="36221" y2="54781"/>
+                        <a14:foregroundMark x1="48899" y1="74104" x2="49192" y2="73971"/>
+                        <a14:foregroundMark x1="50318" y1="74104" x2="50318" y2="74104"/>
+                        <a14:backgroundMark x1="44542" y1="73904" x2="46060" y2="75100"/>
+                        <a14:backgroundMark x1="48434" y1="75920" x2="51738" y2="77092"/>
+                        <a14:backgroundMark x1="47430" y1="75564" x2="48221" y2="75845"/>
+                        <a14:backgroundMark x1="48801" y1="74976" x2="50563" y2="75100"/>
+                        <a14:backgroundMark x1="47724" y1="74900" x2="48566" y2="74959"/>
+                        <a14:backgroundMark x1="35585" y1="41169" x2="34753" y2="45219"/>
+                        <a14:backgroundMark x1="36221" y1="39973" x2="35977" y2="42430"/>
+                        <a14:backgroundMark x1="36711" y1="39110" x2="36515" y2="39841"/>
+                      </a14:backgroundRemoval>
+                    </a14:imgEffect>
+                  </a14:imgLayer>
+                </a14:imgProps>
+              </a:ext>
+              <a:ext uri="{28A0092B-C50C-407E-A947-70E740481C1C}">
+                <a14:useLocalDpi xmlns:a14="http://schemas.microsoft.com/office/drawing/2010/main" val="0"/>
+              </a:ext>
+            </a:extLst>
+          </a:blip>
+          <a:stretch>
+            <a:fillRect/>
+          </a:stretch>
+        </p:blipFill>
+        <p:spPr>
+          <a:xfrm>
+            <a:off x="-7566107" y="-6032524"/>
+            <a:ext cx="25942856" cy="19123809"/>
+          </a:xfrm>
+        </p:spPr>
+      </p:pic>
+    </p:spTree>
+    <p:extLst>
+      <p:ext uri="{BB962C8B-B14F-4D97-AF65-F5344CB8AC3E}">
+        <p14:creationId xmlns:p14="http://schemas.microsoft.com/office/powerpoint/2010/main" val="3798364459"/>
+      </p:ext>
+    </p:extLst>
+  </p:cSld>
+  <p:clrMapOvr>
+    <a:masterClrMapping/>
+  </p:clrMapOvr>
+</p:sld>
+</file>
+
 <file path=ppt/theme/theme1.xml><?xml version="1.0" encoding="utf-8"?>
 <a:theme xmlns:a="http://schemas.openxmlformats.org/drawingml/2006/main" name="Office 테마">
   <a:themeElements>

--- a/이미지.pptx
+++ b/이미지.pptx
@@ -8,6 +8,7 @@
     <p:sldId id="256" r:id="rId2"/>
     <p:sldId id="257" r:id="rId3"/>
     <p:sldId id="258" r:id="rId4"/>
+    <p:sldId id="259" r:id="rId5"/>
   </p:sldIdLst>
   <p:sldSz cx="12192000" cy="6858000"/>
   <p:notesSz cx="6858000" cy="9144000"/>
@@ -261,7 +262,7 @@
           <a:p>
             <a:fld id="{4E0BBF2E-AD17-4D8A-93B6-0D0449C463A1}" type="datetimeFigureOut">
               <a:rPr lang="ko-KR" altLang="en-US" smtClean="0"/>
-              <a:t>2025-09-29</a:t>
+              <a:t>2025-09-30</a:t>
             </a:fld>
             <a:endParaRPr lang="ko-KR" altLang="en-US"/>
           </a:p>
@@ -459,7 +460,7 @@
           <a:p>
             <a:fld id="{4E0BBF2E-AD17-4D8A-93B6-0D0449C463A1}" type="datetimeFigureOut">
               <a:rPr lang="ko-KR" altLang="en-US" smtClean="0"/>
-              <a:t>2025-09-29</a:t>
+              <a:t>2025-09-30</a:t>
             </a:fld>
             <a:endParaRPr lang="ko-KR" altLang="en-US"/>
           </a:p>
@@ -667,7 +668,7 @@
           <a:p>
             <a:fld id="{4E0BBF2E-AD17-4D8A-93B6-0D0449C463A1}" type="datetimeFigureOut">
               <a:rPr lang="ko-KR" altLang="en-US" smtClean="0"/>
-              <a:t>2025-09-29</a:t>
+              <a:t>2025-09-30</a:t>
             </a:fld>
             <a:endParaRPr lang="ko-KR" altLang="en-US"/>
           </a:p>
@@ -865,7 +866,7 @@
           <a:p>
             <a:fld id="{4E0BBF2E-AD17-4D8A-93B6-0D0449C463A1}" type="datetimeFigureOut">
               <a:rPr lang="ko-KR" altLang="en-US" smtClean="0"/>
-              <a:t>2025-09-29</a:t>
+              <a:t>2025-09-30</a:t>
             </a:fld>
             <a:endParaRPr lang="ko-KR" altLang="en-US"/>
           </a:p>
@@ -1140,7 +1141,7 @@
           <a:p>
             <a:fld id="{4E0BBF2E-AD17-4D8A-93B6-0D0449C463A1}" type="datetimeFigureOut">
               <a:rPr lang="ko-KR" altLang="en-US" smtClean="0"/>
-              <a:t>2025-09-29</a:t>
+              <a:t>2025-09-30</a:t>
             </a:fld>
             <a:endParaRPr lang="ko-KR" altLang="en-US"/>
           </a:p>
@@ -1405,7 +1406,7 @@
           <a:p>
             <a:fld id="{4E0BBF2E-AD17-4D8A-93B6-0D0449C463A1}" type="datetimeFigureOut">
               <a:rPr lang="ko-KR" altLang="en-US" smtClean="0"/>
-              <a:t>2025-09-29</a:t>
+              <a:t>2025-09-30</a:t>
             </a:fld>
             <a:endParaRPr lang="ko-KR" altLang="en-US"/>
           </a:p>
@@ -1817,7 +1818,7 @@
           <a:p>
             <a:fld id="{4E0BBF2E-AD17-4D8A-93B6-0D0449C463A1}" type="datetimeFigureOut">
               <a:rPr lang="ko-KR" altLang="en-US" smtClean="0"/>
-              <a:t>2025-09-29</a:t>
+              <a:t>2025-09-30</a:t>
             </a:fld>
             <a:endParaRPr lang="ko-KR" altLang="en-US"/>
           </a:p>
@@ -1958,7 +1959,7 @@
           <a:p>
             <a:fld id="{4E0BBF2E-AD17-4D8A-93B6-0D0449C463A1}" type="datetimeFigureOut">
               <a:rPr lang="ko-KR" altLang="en-US" smtClean="0"/>
-              <a:t>2025-09-29</a:t>
+              <a:t>2025-09-30</a:t>
             </a:fld>
             <a:endParaRPr lang="ko-KR" altLang="en-US"/>
           </a:p>
@@ -2071,7 +2072,7 @@
           <a:p>
             <a:fld id="{4E0BBF2E-AD17-4D8A-93B6-0D0449C463A1}" type="datetimeFigureOut">
               <a:rPr lang="ko-KR" altLang="en-US" smtClean="0"/>
-              <a:t>2025-09-29</a:t>
+              <a:t>2025-09-30</a:t>
             </a:fld>
             <a:endParaRPr lang="ko-KR" altLang="en-US"/>
           </a:p>
@@ -2382,7 +2383,7 @@
           <a:p>
             <a:fld id="{4E0BBF2E-AD17-4D8A-93B6-0D0449C463A1}" type="datetimeFigureOut">
               <a:rPr lang="ko-KR" altLang="en-US" smtClean="0"/>
-              <a:t>2025-09-29</a:t>
+              <a:t>2025-09-30</a:t>
             </a:fld>
             <a:endParaRPr lang="ko-KR" altLang="en-US"/>
           </a:p>
@@ -2670,7 +2671,7 @@
           <a:p>
             <a:fld id="{4E0BBF2E-AD17-4D8A-93B6-0D0449C463A1}" type="datetimeFigureOut">
               <a:rPr lang="ko-KR" altLang="en-US" smtClean="0"/>
-              <a:t>2025-09-29</a:t>
+              <a:t>2025-09-30</a:t>
             </a:fld>
             <a:endParaRPr lang="ko-KR" altLang="en-US"/>
           </a:p>
@@ -2911,7 +2912,7 @@
           <a:p>
             <a:fld id="{4E0BBF2E-AD17-4D8A-93B6-0D0449C463A1}" type="datetimeFigureOut">
               <a:rPr lang="ko-KR" altLang="en-US" smtClean="0"/>
-              <a:t>2025-09-29</a:t>
+              <a:t>2025-09-30</a:t>
             </a:fld>
             <a:endParaRPr lang="ko-KR" altLang="en-US"/>
           </a:p>
@@ -3646,6 +3647,109 @@
 </p:sld>
 </file>
 
+<file path=ppt/slides/slide4.xml><?xml version="1.0" encoding="utf-8"?>
+<p:sld xmlns:a="http://schemas.openxmlformats.org/drawingml/2006/main" xmlns:r="http://schemas.openxmlformats.org/officeDocument/2006/relationships" xmlns:p="http://schemas.openxmlformats.org/presentationml/2006/main">
+  <p:cSld>
+    <p:spTree>
+      <p:nvGrpSpPr>
+        <p:cNvPr id="1" name=""/>
+        <p:cNvGrpSpPr/>
+        <p:nvPr/>
+      </p:nvGrpSpPr>
+      <p:grpSpPr>
+        <a:xfrm>
+          <a:off x="0" y="0"/>
+          <a:ext cx="0" cy="0"/>
+          <a:chOff x="0" y="0"/>
+          <a:chExt cx="0" cy="0"/>
+        </a:xfrm>
+      </p:grpSpPr>
+      <p:sp>
+        <p:nvSpPr>
+          <p:cNvPr id="2" name="제목 1">
+            <a:extLst>
+              <a:ext uri="{FF2B5EF4-FFF2-40B4-BE49-F238E27FC236}">
+                <a16:creationId xmlns:a16="http://schemas.microsoft.com/office/drawing/2014/main" id="{5AEBD654-0364-4273-AECC-775136984FFC}"/>
+              </a:ext>
+            </a:extLst>
+          </p:cNvPr>
+          <p:cNvSpPr>
+            <a:spLocks noGrp="1"/>
+          </p:cNvSpPr>
+          <p:nvPr>
+            <p:ph type="title"/>
+          </p:nvPr>
+        </p:nvSpPr>
+        <p:spPr/>
+        <p:txBody>
+          <a:bodyPr/>
+          <a:lstStyle/>
+          <a:p>
+            <a:endParaRPr lang="ko-KR" altLang="en-US"/>
+          </a:p>
+        </p:txBody>
+      </p:sp>
+      <p:pic>
+        <p:nvPicPr>
+          <p:cNvPr id="5" name="내용 개체 틀 4">
+            <a:extLst>
+              <a:ext uri="{FF2B5EF4-FFF2-40B4-BE49-F238E27FC236}">
+                <a16:creationId xmlns:a16="http://schemas.microsoft.com/office/drawing/2014/main" id="{B95D2514-C0D1-4C79-81EF-2497C4981853}"/>
+              </a:ext>
+            </a:extLst>
+          </p:cNvPr>
+          <p:cNvPicPr>
+            <a:picLocks noGrp="1" noChangeAspect="1"/>
+          </p:cNvPicPr>
+          <p:nvPr>
+            <p:ph idx="1"/>
+          </p:nvPr>
+        </p:nvPicPr>
+        <p:blipFill>
+          <a:blip r:embed="rId2">
+            <a:extLst>
+              <a:ext uri="{BEBA8EAE-BF5A-486C-A8C5-ECC9F3942E4B}">
+                <a14:imgProps xmlns:a14="http://schemas.microsoft.com/office/drawing/2010/main">
+                  <a14:imgLayer r:embed="rId3">
+                    <a14:imgEffect>
+                      <a14:backgroundRemoval t="1225" b="89951" l="9959" r="89973">
+                        <a14:foregroundMark x1="47459" y1="9804" x2="52473" y2="8701"/>
+                        <a14:foregroundMark x1="52473" y1="8701" x2="56662" y2="9191"/>
+                        <a14:foregroundMark x1="49931" y1="3064" x2="52679" y2="1225"/>
+                      </a14:backgroundRemoval>
+                    </a14:imgEffect>
+                  </a14:imgLayer>
+                </a14:imgProps>
+              </a:ext>
+              <a:ext uri="{28A0092B-C50C-407E-A947-70E740481C1C}">
+                <a14:useLocalDpi xmlns:a14="http://schemas.microsoft.com/office/drawing/2010/main" val="0"/>
+              </a:ext>
+            </a:extLst>
+          </a:blip>
+          <a:stretch>
+            <a:fillRect/>
+          </a:stretch>
+        </p:blipFill>
+        <p:spPr>
+          <a:xfrm>
+            <a:off x="-235362" y="0"/>
+            <a:ext cx="13868400" cy="7772400"/>
+          </a:xfrm>
+        </p:spPr>
+      </p:pic>
+    </p:spTree>
+    <p:extLst>
+      <p:ext uri="{BB962C8B-B14F-4D97-AF65-F5344CB8AC3E}">
+        <p14:creationId xmlns:p14="http://schemas.microsoft.com/office/powerpoint/2010/main" val="3572101614"/>
+      </p:ext>
+    </p:extLst>
+  </p:cSld>
+  <p:clrMapOvr>
+    <a:masterClrMapping/>
+  </p:clrMapOvr>
+</p:sld>
+</file>
+
 <file path=ppt/theme/theme1.xml><?xml version="1.0" encoding="utf-8"?>
 <a:theme xmlns:a="http://schemas.openxmlformats.org/drawingml/2006/main" name="Office 테마">
   <a:themeElements>

--- a/이미지.pptx
+++ b/이미지.pptx
@@ -9,6 +9,9 @@
     <p:sldId id="257" r:id="rId3"/>
     <p:sldId id="258" r:id="rId4"/>
     <p:sldId id="259" r:id="rId5"/>
+    <p:sldId id="260" r:id="rId6"/>
+    <p:sldId id="261" r:id="rId7"/>
+    <p:sldId id="262" r:id="rId8"/>
   </p:sldIdLst>
   <p:sldSz cx="12192000" cy="6858000"/>
   <p:notesSz cx="6858000" cy="9144000"/>
@@ -262,7 +265,7 @@
           <a:p>
             <a:fld id="{4E0BBF2E-AD17-4D8A-93B6-0D0449C463A1}" type="datetimeFigureOut">
               <a:rPr lang="ko-KR" altLang="en-US" smtClean="0"/>
-              <a:t>2025-09-30</a:t>
+              <a:t>2025-10-04</a:t>
             </a:fld>
             <a:endParaRPr lang="ko-KR" altLang="en-US"/>
           </a:p>
@@ -460,7 +463,7 @@
           <a:p>
             <a:fld id="{4E0BBF2E-AD17-4D8A-93B6-0D0449C463A1}" type="datetimeFigureOut">
               <a:rPr lang="ko-KR" altLang="en-US" smtClean="0"/>
-              <a:t>2025-09-30</a:t>
+              <a:t>2025-10-04</a:t>
             </a:fld>
             <a:endParaRPr lang="ko-KR" altLang="en-US"/>
           </a:p>
@@ -668,7 +671,7 @@
           <a:p>
             <a:fld id="{4E0BBF2E-AD17-4D8A-93B6-0D0449C463A1}" type="datetimeFigureOut">
               <a:rPr lang="ko-KR" altLang="en-US" smtClean="0"/>
-              <a:t>2025-09-30</a:t>
+              <a:t>2025-10-04</a:t>
             </a:fld>
             <a:endParaRPr lang="ko-KR" altLang="en-US"/>
           </a:p>
@@ -866,7 +869,7 @@
           <a:p>
             <a:fld id="{4E0BBF2E-AD17-4D8A-93B6-0D0449C463A1}" type="datetimeFigureOut">
               <a:rPr lang="ko-KR" altLang="en-US" smtClean="0"/>
-              <a:t>2025-09-30</a:t>
+              <a:t>2025-10-04</a:t>
             </a:fld>
             <a:endParaRPr lang="ko-KR" altLang="en-US"/>
           </a:p>
@@ -1141,7 +1144,7 @@
           <a:p>
             <a:fld id="{4E0BBF2E-AD17-4D8A-93B6-0D0449C463A1}" type="datetimeFigureOut">
               <a:rPr lang="ko-KR" altLang="en-US" smtClean="0"/>
-              <a:t>2025-09-30</a:t>
+              <a:t>2025-10-04</a:t>
             </a:fld>
             <a:endParaRPr lang="ko-KR" altLang="en-US"/>
           </a:p>
@@ -1406,7 +1409,7 @@
           <a:p>
             <a:fld id="{4E0BBF2E-AD17-4D8A-93B6-0D0449C463A1}" type="datetimeFigureOut">
               <a:rPr lang="ko-KR" altLang="en-US" smtClean="0"/>
-              <a:t>2025-09-30</a:t>
+              <a:t>2025-10-04</a:t>
             </a:fld>
             <a:endParaRPr lang="ko-KR" altLang="en-US"/>
           </a:p>
@@ -1818,7 +1821,7 @@
           <a:p>
             <a:fld id="{4E0BBF2E-AD17-4D8A-93B6-0D0449C463A1}" type="datetimeFigureOut">
               <a:rPr lang="ko-KR" altLang="en-US" smtClean="0"/>
-              <a:t>2025-09-30</a:t>
+              <a:t>2025-10-04</a:t>
             </a:fld>
             <a:endParaRPr lang="ko-KR" altLang="en-US"/>
           </a:p>
@@ -1959,7 +1962,7 @@
           <a:p>
             <a:fld id="{4E0BBF2E-AD17-4D8A-93B6-0D0449C463A1}" type="datetimeFigureOut">
               <a:rPr lang="ko-KR" altLang="en-US" smtClean="0"/>
-              <a:t>2025-09-30</a:t>
+              <a:t>2025-10-04</a:t>
             </a:fld>
             <a:endParaRPr lang="ko-KR" altLang="en-US"/>
           </a:p>
@@ -2072,7 +2075,7 @@
           <a:p>
             <a:fld id="{4E0BBF2E-AD17-4D8A-93B6-0D0449C463A1}" type="datetimeFigureOut">
               <a:rPr lang="ko-KR" altLang="en-US" smtClean="0"/>
-              <a:t>2025-09-30</a:t>
+              <a:t>2025-10-04</a:t>
             </a:fld>
             <a:endParaRPr lang="ko-KR" altLang="en-US"/>
           </a:p>
@@ -2383,7 +2386,7 @@
           <a:p>
             <a:fld id="{4E0BBF2E-AD17-4D8A-93B6-0D0449C463A1}" type="datetimeFigureOut">
               <a:rPr lang="ko-KR" altLang="en-US" smtClean="0"/>
-              <a:t>2025-09-30</a:t>
+              <a:t>2025-10-04</a:t>
             </a:fld>
             <a:endParaRPr lang="ko-KR" altLang="en-US"/>
           </a:p>
@@ -2671,7 +2674,7 @@
           <a:p>
             <a:fld id="{4E0BBF2E-AD17-4D8A-93B6-0D0449C463A1}" type="datetimeFigureOut">
               <a:rPr lang="ko-KR" altLang="en-US" smtClean="0"/>
-              <a:t>2025-09-30</a:t>
+              <a:t>2025-10-04</a:t>
             </a:fld>
             <a:endParaRPr lang="ko-KR" altLang="en-US"/>
           </a:p>
@@ -2912,7 +2915,7 @@
           <a:p>
             <a:fld id="{4E0BBF2E-AD17-4D8A-93B6-0D0449C463A1}" type="datetimeFigureOut">
               <a:rPr lang="ko-KR" altLang="en-US" smtClean="0"/>
-              <a:t>2025-09-30</a:t>
+              <a:t>2025-10-04</a:t>
             </a:fld>
             <a:endParaRPr lang="ko-KR" altLang="en-US"/>
           </a:p>
@@ -3750,6 +3753,432 @@
 </p:sld>
 </file>
 
+<file path=ppt/slides/slide5.xml><?xml version="1.0" encoding="utf-8"?>
+<p:sld xmlns:a="http://schemas.openxmlformats.org/drawingml/2006/main" xmlns:r="http://schemas.openxmlformats.org/officeDocument/2006/relationships" xmlns:p="http://schemas.openxmlformats.org/presentationml/2006/main">
+  <p:cSld>
+    <p:spTree>
+      <p:nvGrpSpPr>
+        <p:cNvPr id="1" name=""/>
+        <p:cNvGrpSpPr/>
+        <p:nvPr/>
+      </p:nvGrpSpPr>
+      <p:grpSpPr>
+        <a:xfrm>
+          <a:off x="0" y="0"/>
+          <a:ext cx="0" cy="0"/>
+          <a:chOff x="0" y="0"/>
+          <a:chExt cx="0" cy="0"/>
+        </a:xfrm>
+      </p:grpSpPr>
+      <p:pic>
+        <p:nvPicPr>
+          <p:cNvPr id="1026" name="Picture 2" descr="Ink Drop Images – Browse 935,407 Stock Photos, Vectors, and Video | Adobe  Stock">
+            <a:extLst>
+              <a:ext uri="{FF2B5EF4-FFF2-40B4-BE49-F238E27FC236}">
+                <a16:creationId xmlns:a16="http://schemas.microsoft.com/office/drawing/2014/main" id="{472B32E2-1E39-4519-ACEA-80E9CC98CA80}"/>
+              </a:ext>
+            </a:extLst>
+          </p:cNvPr>
+          <p:cNvPicPr>
+            <a:picLocks noChangeAspect="1" noChangeArrowheads="1"/>
+          </p:cNvPicPr>
+          <p:nvPr/>
+        </p:nvPicPr>
+        <p:blipFill>
+          <a:blip r:embed="rId2">
+            <a:extLst>
+              <a:ext uri="{BEBA8EAE-BF5A-486C-A8C5-ECC9F3942E4B}">
+                <a14:imgProps xmlns:a14="http://schemas.microsoft.com/office/drawing/2010/main">
+                  <a14:imgLayer r:embed="rId3">
+                    <a14:imgEffect>
+                      <a14:backgroundRemoval t="10000" b="90000" l="10000" r="90000"/>
+                    </a14:imgEffect>
+                  </a14:imgLayer>
+                </a14:imgProps>
+              </a:ext>
+              <a:ext uri="{28A0092B-C50C-407E-A947-70E740481C1C}">
+                <a14:useLocalDpi xmlns:a14="http://schemas.microsoft.com/office/drawing/2010/main" val="0"/>
+              </a:ext>
+            </a:extLst>
+          </a:blip>
+          <a:srcRect/>
+          <a:stretch>
+            <a:fillRect/>
+          </a:stretch>
+        </p:blipFill>
+        <p:spPr bwMode="auto">
+          <a:xfrm>
+            <a:off x="-600892" y="-188884"/>
+            <a:ext cx="7974084" cy="5316056"/>
+          </a:xfrm>
+          <a:prstGeom prst="rect">
+            <a:avLst/>
+          </a:prstGeom>
+          <a:noFill/>
+          <a:extLst>
+            <a:ext uri="{909E8E84-426E-40DD-AFC4-6F175D3DCCD1}">
+              <a14:hiddenFill xmlns:a14="http://schemas.microsoft.com/office/drawing/2010/main">
+                <a:solidFill>
+                  <a:srgbClr val="FFFFFF"/>
+                </a:solidFill>
+              </a14:hiddenFill>
+            </a:ext>
+          </a:extLst>
+        </p:spPr>
+      </p:pic>
+    </p:spTree>
+    <p:extLst>
+      <p:ext uri="{BB962C8B-B14F-4D97-AF65-F5344CB8AC3E}">
+        <p14:creationId xmlns:p14="http://schemas.microsoft.com/office/powerpoint/2010/main" val="1117737602"/>
+      </p:ext>
+    </p:extLst>
+  </p:cSld>
+  <p:clrMapOvr>
+    <a:masterClrMapping/>
+  </p:clrMapOvr>
+</p:sld>
+</file>
+
+<file path=ppt/slides/slide6.xml><?xml version="1.0" encoding="utf-8"?>
+<p:sld xmlns:a="http://schemas.openxmlformats.org/drawingml/2006/main" xmlns:r="http://schemas.openxmlformats.org/officeDocument/2006/relationships" xmlns:p="http://schemas.openxmlformats.org/presentationml/2006/main">
+  <p:cSld>
+    <p:spTree>
+      <p:nvGrpSpPr>
+        <p:cNvPr id="1" name=""/>
+        <p:cNvGrpSpPr/>
+        <p:nvPr/>
+      </p:nvGrpSpPr>
+      <p:grpSpPr>
+        <a:xfrm>
+          <a:off x="0" y="0"/>
+          <a:ext cx="0" cy="0"/>
+          <a:chOff x="0" y="0"/>
+          <a:chExt cx="0" cy="0"/>
+        </a:xfrm>
+      </p:grpSpPr>
+      <p:pic>
+        <p:nvPicPr>
+          <p:cNvPr id="1026" name="Picture 2" descr="Ink Drop Images – Browse 935,407 Stock Photos, Vectors, and Video | Adobe  Stock">
+            <a:extLst>
+              <a:ext uri="{FF2B5EF4-FFF2-40B4-BE49-F238E27FC236}">
+                <a16:creationId xmlns:a16="http://schemas.microsoft.com/office/drawing/2014/main" id="{472B32E2-1E39-4519-ACEA-80E9CC98CA80}"/>
+              </a:ext>
+            </a:extLst>
+          </p:cNvPr>
+          <p:cNvPicPr>
+            <a:picLocks noChangeAspect="1" noChangeArrowheads="1"/>
+          </p:cNvPicPr>
+          <p:nvPr/>
+        </p:nvPicPr>
+        <p:blipFill>
+          <a:blip r:embed="rId2">
+            <a:extLst>
+              <a:ext uri="{BEBA8EAE-BF5A-486C-A8C5-ECC9F3942E4B}">
+                <a14:imgProps xmlns:a14="http://schemas.microsoft.com/office/drawing/2010/main">
+                  <a14:imgLayer r:embed="rId3">
+                    <a14:imgEffect>
+                      <a14:backgroundRemoval t="10000" b="90000" l="10000" r="90000"/>
+                    </a14:imgEffect>
+                  </a14:imgLayer>
+                </a14:imgProps>
+              </a:ext>
+              <a:ext uri="{28A0092B-C50C-407E-A947-70E740481C1C}">
+                <a14:useLocalDpi xmlns:a14="http://schemas.microsoft.com/office/drawing/2010/main" val="0"/>
+              </a:ext>
+            </a:extLst>
+          </a:blip>
+          <a:srcRect/>
+          <a:stretch>
+            <a:fillRect/>
+          </a:stretch>
+        </p:blipFill>
+        <p:spPr bwMode="auto">
+          <a:xfrm>
+            <a:off x="-600892" y="-188884"/>
+            <a:ext cx="7974084" cy="5316056"/>
+          </a:xfrm>
+          <a:prstGeom prst="rect">
+            <a:avLst/>
+          </a:prstGeom>
+          <a:noFill/>
+          <a:extLst>
+            <a:ext uri="{909E8E84-426E-40DD-AFC4-6F175D3DCCD1}">
+              <a14:hiddenFill xmlns:a14="http://schemas.microsoft.com/office/drawing/2010/main">
+                <a:solidFill>
+                  <a:srgbClr val="FFFFFF"/>
+                </a:solidFill>
+              </a14:hiddenFill>
+            </a:ext>
+          </a:extLst>
+        </p:spPr>
+      </p:pic>
+      <p:pic>
+        <p:nvPicPr>
+          <p:cNvPr id="3" name="Picture 2" descr="Ink Drop Images – Browse 935,407 Stock Photos, Vectors, and Video | Adobe  Stock">
+            <a:extLst>
+              <a:ext uri="{FF2B5EF4-FFF2-40B4-BE49-F238E27FC236}">
+                <a16:creationId xmlns:a16="http://schemas.microsoft.com/office/drawing/2014/main" id="{ED3CBE5A-3244-4E93-A71E-1BF7913DB628}"/>
+              </a:ext>
+            </a:extLst>
+          </p:cNvPr>
+          <p:cNvPicPr>
+            <a:picLocks noChangeAspect="1" noChangeArrowheads="1"/>
+          </p:cNvPicPr>
+          <p:nvPr/>
+        </p:nvPicPr>
+        <p:blipFill>
+          <a:blip r:embed="rId2">
+            <a:extLst>
+              <a:ext uri="{BEBA8EAE-BF5A-486C-A8C5-ECC9F3942E4B}">
+                <a14:imgProps xmlns:a14="http://schemas.microsoft.com/office/drawing/2010/main">
+                  <a14:imgLayer r:embed="rId3">
+                    <a14:imgEffect>
+                      <a14:backgroundRemoval t="10000" b="90000" l="10000" r="90000"/>
+                    </a14:imgEffect>
+                  </a14:imgLayer>
+                </a14:imgProps>
+              </a:ext>
+              <a:ext uri="{28A0092B-C50C-407E-A947-70E740481C1C}">
+                <a14:useLocalDpi xmlns:a14="http://schemas.microsoft.com/office/drawing/2010/main" val="0"/>
+              </a:ext>
+            </a:extLst>
+          </a:blip>
+          <a:srcRect/>
+          <a:stretch>
+            <a:fillRect/>
+          </a:stretch>
+        </p:blipFill>
+        <p:spPr bwMode="auto">
+          <a:xfrm>
+            <a:off x="2294709" y="2536899"/>
+            <a:ext cx="7974084" cy="5316056"/>
+          </a:xfrm>
+          <a:prstGeom prst="rect">
+            <a:avLst/>
+          </a:prstGeom>
+          <a:noFill/>
+          <a:extLst>
+            <a:ext uri="{909E8E84-426E-40DD-AFC4-6F175D3DCCD1}">
+              <a14:hiddenFill xmlns:a14="http://schemas.microsoft.com/office/drawing/2010/main">
+                <a:solidFill>
+                  <a:srgbClr val="FFFFFF"/>
+                </a:solidFill>
+              </a14:hiddenFill>
+            </a:ext>
+          </a:extLst>
+        </p:spPr>
+      </p:pic>
+    </p:spTree>
+    <p:extLst>
+      <p:ext uri="{BB962C8B-B14F-4D97-AF65-F5344CB8AC3E}">
+        <p14:creationId xmlns:p14="http://schemas.microsoft.com/office/powerpoint/2010/main" val="243839717"/>
+      </p:ext>
+    </p:extLst>
+  </p:cSld>
+  <p:clrMapOvr>
+    <a:masterClrMapping/>
+  </p:clrMapOvr>
+</p:sld>
+</file>
+
+<file path=ppt/slides/slide7.xml><?xml version="1.0" encoding="utf-8"?>
+<p:sld xmlns:a="http://schemas.openxmlformats.org/drawingml/2006/main" xmlns:r="http://schemas.openxmlformats.org/officeDocument/2006/relationships" xmlns:p="http://schemas.openxmlformats.org/presentationml/2006/main">
+  <p:cSld>
+    <p:spTree>
+      <p:nvGrpSpPr>
+        <p:cNvPr id="1" name=""/>
+        <p:cNvGrpSpPr/>
+        <p:nvPr/>
+      </p:nvGrpSpPr>
+      <p:grpSpPr>
+        <a:xfrm>
+          <a:off x="0" y="0"/>
+          <a:ext cx="0" cy="0"/>
+          <a:chOff x="0" y="0"/>
+          <a:chExt cx="0" cy="0"/>
+        </a:xfrm>
+      </p:grpSpPr>
+      <p:pic>
+        <p:nvPicPr>
+          <p:cNvPr id="1026" name="Picture 2" descr="Ink Drop Images – Browse 935,407 Stock Photos, Vectors, and Video | Adobe  Stock">
+            <a:extLst>
+              <a:ext uri="{FF2B5EF4-FFF2-40B4-BE49-F238E27FC236}">
+                <a16:creationId xmlns:a16="http://schemas.microsoft.com/office/drawing/2014/main" id="{472B32E2-1E39-4519-ACEA-80E9CC98CA80}"/>
+              </a:ext>
+            </a:extLst>
+          </p:cNvPr>
+          <p:cNvPicPr>
+            <a:picLocks noChangeAspect="1" noChangeArrowheads="1"/>
+          </p:cNvPicPr>
+          <p:nvPr/>
+        </p:nvPicPr>
+        <p:blipFill>
+          <a:blip r:embed="rId2">
+            <a:extLst>
+              <a:ext uri="{BEBA8EAE-BF5A-486C-A8C5-ECC9F3942E4B}">
+                <a14:imgProps xmlns:a14="http://schemas.microsoft.com/office/drawing/2010/main">
+                  <a14:imgLayer r:embed="rId3">
+                    <a14:imgEffect>
+                      <a14:backgroundRemoval t="10000" b="90000" l="10000" r="90000"/>
+                    </a14:imgEffect>
+                  </a14:imgLayer>
+                </a14:imgProps>
+              </a:ext>
+              <a:ext uri="{28A0092B-C50C-407E-A947-70E740481C1C}">
+                <a14:useLocalDpi xmlns:a14="http://schemas.microsoft.com/office/drawing/2010/main" val="0"/>
+              </a:ext>
+            </a:extLst>
+          </a:blip>
+          <a:srcRect/>
+          <a:stretch>
+            <a:fillRect/>
+          </a:stretch>
+        </p:blipFill>
+        <p:spPr bwMode="auto">
+          <a:xfrm>
+            <a:off x="-600892" y="-188884"/>
+            <a:ext cx="7974084" cy="5316056"/>
+          </a:xfrm>
+          <a:prstGeom prst="rect">
+            <a:avLst/>
+          </a:prstGeom>
+          <a:noFill/>
+          <a:extLst>
+            <a:ext uri="{909E8E84-426E-40DD-AFC4-6F175D3DCCD1}">
+              <a14:hiddenFill xmlns:a14="http://schemas.microsoft.com/office/drawing/2010/main">
+                <a:solidFill>
+                  <a:srgbClr val="FFFFFF"/>
+                </a:solidFill>
+              </a14:hiddenFill>
+            </a:ext>
+          </a:extLst>
+        </p:spPr>
+      </p:pic>
+      <p:pic>
+        <p:nvPicPr>
+          <p:cNvPr id="3" name="Picture 2" descr="Ink Drop Images – Browse 935,407 Stock Photos, Vectors, and Video | Adobe  Stock">
+            <a:extLst>
+              <a:ext uri="{FF2B5EF4-FFF2-40B4-BE49-F238E27FC236}">
+                <a16:creationId xmlns:a16="http://schemas.microsoft.com/office/drawing/2014/main" id="{ED3CBE5A-3244-4E93-A71E-1BF7913DB628}"/>
+              </a:ext>
+            </a:extLst>
+          </p:cNvPr>
+          <p:cNvPicPr>
+            <a:picLocks noChangeAspect="1" noChangeArrowheads="1"/>
+          </p:cNvPicPr>
+          <p:nvPr/>
+        </p:nvPicPr>
+        <p:blipFill>
+          <a:blip r:embed="rId2">
+            <a:extLst>
+              <a:ext uri="{BEBA8EAE-BF5A-486C-A8C5-ECC9F3942E4B}">
+                <a14:imgProps xmlns:a14="http://schemas.microsoft.com/office/drawing/2010/main">
+                  <a14:imgLayer r:embed="rId3">
+                    <a14:imgEffect>
+                      <a14:backgroundRemoval t="10000" b="90000" l="10000" r="90000"/>
+                    </a14:imgEffect>
+                  </a14:imgLayer>
+                </a14:imgProps>
+              </a:ext>
+              <a:ext uri="{28A0092B-C50C-407E-A947-70E740481C1C}">
+                <a14:useLocalDpi xmlns:a14="http://schemas.microsoft.com/office/drawing/2010/main" val="0"/>
+              </a:ext>
+            </a:extLst>
+          </a:blip>
+          <a:srcRect/>
+          <a:stretch>
+            <a:fillRect/>
+          </a:stretch>
+        </p:blipFill>
+        <p:spPr bwMode="auto">
+          <a:xfrm>
+            <a:off x="2170612" y="2469144"/>
+            <a:ext cx="7974084" cy="5316056"/>
+          </a:xfrm>
+          <a:prstGeom prst="rect">
+            <a:avLst/>
+          </a:prstGeom>
+          <a:noFill/>
+          <a:extLst>
+            <a:ext uri="{909E8E84-426E-40DD-AFC4-6F175D3DCCD1}">
+              <a14:hiddenFill xmlns:a14="http://schemas.microsoft.com/office/drawing/2010/main">
+                <a:solidFill>
+                  <a:srgbClr val="FFFFFF"/>
+                </a:solidFill>
+              </a14:hiddenFill>
+            </a:ext>
+          </a:extLst>
+        </p:spPr>
+      </p:pic>
+      <p:pic>
+        <p:nvPicPr>
+          <p:cNvPr id="4" name="Picture 2" descr="Ink Drop Images – Browse 935,407 Stock Photos, Vectors, and Video | Adobe  Stock">
+            <a:extLst>
+              <a:ext uri="{FF2B5EF4-FFF2-40B4-BE49-F238E27FC236}">
+                <a16:creationId xmlns:a16="http://schemas.microsoft.com/office/drawing/2014/main" id="{F590EF1D-AD98-4F6C-81A3-70BDBF1BCFA8}"/>
+              </a:ext>
+            </a:extLst>
+          </p:cNvPr>
+          <p:cNvPicPr>
+            <a:picLocks noChangeAspect="1" noChangeArrowheads="1"/>
+          </p:cNvPicPr>
+          <p:nvPr/>
+        </p:nvPicPr>
+        <p:blipFill>
+          <a:blip r:embed="rId2">
+            <a:extLst>
+              <a:ext uri="{BEBA8EAE-BF5A-486C-A8C5-ECC9F3942E4B}">
+                <a14:imgProps xmlns:a14="http://schemas.microsoft.com/office/drawing/2010/main">
+                  <a14:imgLayer r:embed="rId3">
+                    <a14:imgEffect>
+                      <a14:backgroundRemoval t="10000" b="90000" l="10000" r="90000"/>
+                    </a14:imgEffect>
+                  </a14:imgLayer>
+                </a14:imgProps>
+              </a:ext>
+              <a:ext uri="{28A0092B-C50C-407E-A947-70E740481C1C}">
+                <a14:useLocalDpi xmlns:a14="http://schemas.microsoft.com/office/drawing/2010/main" val="0"/>
+              </a:ext>
+            </a:extLst>
+          </a:blip>
+          <a:srcRect/>
+          <a:stretch>
+            <a:fillRect/>
+          </a:stretch>
+        </p:blipFill>
+        <p:spPr bwMode="auto">
+          <a:xfrm>
+            <a:off x="4478383" y="-1320999"/>
+            <a:ext cx="7974084" cy="5316056"/>
+          </a:xfrm>
+          <a:prstGeom prst="rect">
+            <a:avLst/>
+          </a:prstGeom>
+          <a:noFill/>
+          <a:extLst>
+            <a:ext uri="{909E8E84-426E-40DD-AFC4-6F175D3DCCD1}">
+              <a14:hiddenFill xmlns:a14="http://schemas.microsoft.com/office/drawing/2010/main">
+                <a:solidFill>
+                  <a:srgbClr val="FFFFFF"/>
+                </a:solidFill>
+              </a14:hiddenFill>
+            </a:ext>
+          </a:extLst>
+        </p:spPr>
+      </p:pic>
+    </p:spTree>
+    <p:extLst>
+      <p:ext uri="{BB962C8B-B14F-4D97-AF65-F5344CB8AC3E}">
+        <p14:creationId xmlns:p14="http://schemas.microsoft.com/office/powerpoint/2010/main" val="3771187061"/>
+      </p:ext>
+    </p:extLst>
+  </p:cSld>
+  <p:clrMapOvr>
+    <a:masterClrMapping/>
+  </p:clrMapOvr>
+</p:sld>
+</file>
+
 <file path=ppt/theme/theme1.xml><?xml version="1.0" encoding="utf-8"?>
 <a:theme xmlns:a="http://schemas.openxmlformats.org/drawingml/2006/main" name="Office 테마">
   <a:themeElements>
